--- a/slides/lecture1_honest_probabilities.pptx
+++ b/slides/lecture1_honest_probabilities.pptx
@@ -4058,7 +4058,7 @@
                 <a:ea typeface="Calibri" pitchFamily="34" charset="-122"/>
                 <a:cs typeface="Calibri" pitchFamily="34" charset="-120"/>
               </a:rPr>
-              <a:t>Epistemic uncertainty falls steadily from 250 to 16,000 training patients. Aleatoric uncertainty barely moves - it is a property of the cohort, not of your sample size.</a:t>
+              <a:t>Bootstrap spread - our proxy for epistemic uncertainty - falls steadily from 250 to 16,000 training patients. The aleatoric term barely moves; it is a property of the cohort, not of your sample size.</a:t>
             </a:r>
             <a:endParaRPr lang="en-US" sz="1550" dirty="0"/>
           </a:p>
@@ -7188,7 +7188,7 @@
                 <a:ea typeface="Calibri" pitchFamily="34" charset="-122"/>
                 <a:cs typeface="Calibri" pitchFamily="34" charset="-120"/>
               </a:rPr>
-              <a:t>Site C is visible on day one</a:t>
+              <a:t>Site C is a covariate shift</a:t>
             </a:r>
             <a:endParaRPr lang="en-US" sz="1550" dirty="0"/>
           </a:p>
@@ -7230,7 +7230,7 @@
                 <a:ea typeface="Calibri" pitchFamily="34" charset="-122"/>
                 <a:cs typeface="Calibri" pitchFamily="34" charset="-120"/>
               </a:rPr>
-              <a:t>Standardised mean differences on lactate, creatinine and WBC are large. A drift alarm fires immediately, with no outcome labels.</a:t>
+              <a:t>Large standardised mean differences on lactate, creatinine and WBC. A drift alarm fires on day one, with no outcome labels needed.</a:t>
             </a:r>
             <a:endParaRPr lang="en-US" sz="1350" dirty="0"/>
           </a:p>
@@ -7328,7 +7328,7 @@
                 <a:ea typeface="Calibri" pitchFamily="34" charset="-122"/>
                 <a:cs typeface="Calibri" pitchFamily="34" charset="-120"/>
               </a:rPr>
-              <a:t>Site B is invisible</a:t>
+              <a:t>Site B is a conditional shift</a:t>
             </a:r>
             <a:endParaRPr lang="en-US" sz="1550" dirty="0"/>
           </a:p>
@@ -7370,7 +7370,7 @@
                 <a:ea typeface="Calibri" pitchFamily="34" charset="-122"/>
                 <a:cs typeface="Calibri" pitchFamily="34" charset="-120"/>
               </a:rPr>
-              <a:t>Every standardised mean difference is under 0.03. The covariate distribution is unchanged. What moved is the conditional risk.</a:t>
+              <a:t>Every standardised mean difference is under 0.03. The inputs are unchanged; the risk they carry moved. Not label shift - that assumes a stable P(X given Y), which fails here.</a:t>
             </a:r>
             <a:endParaRPr lang="en-US" sz="1350" dirty="0"/>
           </a:p>
@@ -7468,7 +7468,7 @@
                 <a:ea typeface="Calibri" pitchFamily="34" charset="-122"/>
                 <a:cs typeface="Calibri" pitchFamily="34" charset="-120"/>
               </a:rPr>
-              <a:t>So the alarm is structural</a:t>
+              <a:t>So the gap is structural</a:t>
             </a:r>
             <a:endParaRPr lang="en-US" sz="1550" dirty="0"/>
           </a:p>
@@ -7510,7 +7510,7 @@
                 <a:ea typeface="Calibri" pitchFamily="34" charset="-122"/>
                 <a:cs typeface="Calibri" pitchFamily="34" charset="-120"/>
               </a:rPr>
-              <a:t>Input monitoring catches shifts in P(X) and is blind to shifts in P(Y|X) by construction. No dashboard tuning fixes that.</a:t>
+              <a:t>Input monitoring watches the inputs. It cannot license a claim about the risk attached to them, however green the dashboard looks.</a:t>
             </a:r>
             <a:endParaRPr lang="en-US" sz="1350" dirty="0"/>
           </a:p>
@@ -7760,7 +7760,7 @@
                 <a:ea typeface="Cambria" pitchFamily="34" charset="-122"/>
                 <a:cs typeface="Cambria" pitchFamily="34" charset="-120"/>
               </a:rPr>
-              <a:t>Prospective label collection is not optional</a:t>
+              <a:t>The absence of observed input drift is not</a:t>
             </a:r>
             <a:endParaRPr lang="en-US" sz="3600" dirty="0"/>
           </a:p>
@@ -7780,7 +7780,7 @@
                 <a:ea typeface="Cambria" pitchFamily="34" charset="-122"/>
                 <a:cs typeface="Cambria" pitchFamily="34" charset="-120"/>
               </a:rPr>
-              <a:t>infrastructure. It is the monitoring system.</a:t>
+              <a:t>evidence that the model is still valid.</a:t>
             </a:r>
             <a:endParaRPr lang="en-US" sz="3600" dirty="0"/>
           </a:p>
@@ -7842,7 +7842,7 @@
                 <a:ea typeface="Calibri" pitchFamily="34" charset="-122"/>
                 <a:cs typeface="Calibri" pitchFamily="34" charset="-120"/>
               </a:rPr>
-              <a:t>Most deployed monitoring is an input-drift dashboard. It catches one of the two common failures and is structurally blind to the other. If you can only fund one thing after go-live, fund the outcome data.</a:t>
+              <a:t>Input monitoring never had access to the thing that moved at site B, so it cannot establish that the conditional risk has held. Confirming that takes outcome data, or a surrogate you have validated against outcomes. Most deployed monitoring is an input-drift dashboard, which makes a green dashboard a much weaker statement than the people reading it believe.</a:t>
             </a:r>
             <a:endParaRPr lang="en-US" sz="1800" dirty="0"/>
           </a:p>
@@ -8977,7 +8977,7 @@
                 <a:ea typeface="Calibri" pitchFamily="34" charset="-122"/>
                 <a:cs typeface="Calibri" pitchFamily="34" charset="-120"/>
               </a:rPr>
-              <a:t>Input monitoring has a blind spot</a:t>
+              <a:t>A green input dashboard proves little</a:t>
             </a:r>
             <a:endParaRPr lang="en-US" sz="1700" dirty="0"/>
           </a:p>
@@ -9019,7 +9019,7 @@
                 <a:ea typeface="Calibri" pitchFamily="34" charset="-122"/>
                 <a:cs typeface="Calibri" pitchFamily="34" charset="-120"/>
               </a:rPr>
-              <a:t>Plan label collection accordingly</a:t>
+              <a:t>It cannot license a claim about conditional risk</a:t>
             </a:r>
             <a:endParaRPr lang="en-US" sz="1450" dirty="0"/>
           </a:p>

--- a/slides/lecture1_honest_probabilities.pptx
+++ b/slides/lecture1_honest_probabilities.pptx
@@ -6762,7 +6762,7 @@
                 <a:ea typeface="Calibri" pitchFamily="34" charset="-122"/>
                 <a:cs typeface="Calibri" pitchFamily="34" charset="-120"/>
               </a:rPr>
-              <a:t>Site B has a sicker intake. Site C runs older analysers. Nothing about the model changes.</a:t>
+              <a:t>Site B has higher risk for similar recorded inputs. Site C has noisier measurements. The fitted model is unchanged.</a:t>
             </a:r>
             <a:endParaRPr lang="en-US" sz="1800" dirty="0"/>
           </a:p>
@@ -6872,7 +6872,7 @@
                 <a:ea typeface="Cambria" pitchFamily="34" charset="-122"/>
                 <a:cs typeface="Cambria" pitchFamily="34" charset="-120"/>
               </a:rPr>
-              <a:t>Ranking transfers. The numbers do not.</a:t>
+              <a:t>Here ranking holds, but risk estimates do not.</a:t>
             </a:r>
             <a:endParaRPr lang="en-US" sz="3000" dirty="0"/>
           </a:p>
@@ -7067,7 +7067,7 @@
                 <a:ea typeface="Cambria" pitchFamily="34" charset="-122"/>
                 <a:cs typeface="Cambria" pitchFamily="34" charset="-120"/>
               </a:rPr>
-              <a:t>Covariate monitoring sees one of these two failures</a:t>
+              <a:t>Input monitoring sees only part of the problem</a:t>
             </a:r>
             <a:endParaRPr lang="en-US" sz="3000" dirty="0"/>
           </a:p>
@@ -7188,7 +7188,7 @@
                 <a:ea typeface="Calibri" pitchFamily="34" charset="-122"/>
                 <a:cs typeface="Calibri" pitchFamily="34" charset="-120"/>
               </a:rPr>
-              <a:t>Site C is a covariate shift</a:t>
+              <a:t>Site C has measurement drift</a:t>
             </a:r>
             <a:endParaRPr lang="en-US" sz="1550" dirty="0"/>
           </a:p>
@@ -7230,7 +7230,7 @@
                 <a:ea typeface="Calibri" pitchFamily="34" charset="-122"/>
                 <a:cs typeface="Calibri" pitchFamily="34" charset="-120"/>
               </a:rPr>
-              <a:t>Large standardised mean differences on lactate, creatinine and WBC. A drift alarm fires on day one, with no outcome labels needed.</a:t>
+              <a:t>Some measured labs change because instruments are noisier. Input checks can detect a change, but this is not necessarily pure covariate shift.</a:t>
             </a:r>
             <a:endParaRPr lang="en-US" sz="1350" dirty="0"/>
           </a:p>
@@ -9295,7 +9295,7 @@
                 <a:ea typeface="Calibri" pitchFamily="34" charset="-122"/>
                 <a:cs typeface="Calibri" pitchFamily="34" charset="-120"/>
               </a:rPr>
-              <a:t>Repairing calibration at a new site and what it costs in labelled patients. Using ensemble disagreement to decide when a model should refuse to answer. Choosing an operating threshold from clinical costs rather than from 0.5. Borrowing strength across hospitals with hierarchical models. Then the project: six teams, one task, six different reasons not to deploy.</a:t>
+              <a:t>Repairing calibration at a new site and what it costs in labelled patients. Using ensemble disagreement to decide when a model should refuse to answer. Choosing an operating threshold from clinical costs rather than from 0.5. Borrowing strength across hospitals with hierarchical models. Then an open project: should we trust a model at a new hospital with only a small outcome audit?</a:t>
             </a:r>
             <a:endParaRPr lang="en-US" sz="1800" dirty="0"/>
           </a:p>
@@ -9405,7 +9405,7 @@
                 <a:ea typeface="Cambria" pitchFamily="34" charset="-122"/>
                 <a:cs typeface="Cambria" pitchFamily="34" charset="-120"/>
               </a:rPr>
-              <a:t>Six ideas, one hour and a half</a:t>
+              <a:t>Six ideas, one clinical question</a:t>
             </a:r>
             <a:endParaRPr lang="en-US" sz="3000" dirty="0"/>
           </a:p>
@@ -9685,7 +9685,7 @@
                 <a:ea typeface="Calibri" pitchFamily="34" charset="-122"/>
                 <a:cs typeface="Calibri" pitchFamily="34" charset="-120"/>
               </a:rPr>
-              <a:t>Only one of them survives a change of hospital</a:t>
+              <a:t>Neither is guaranteed to transfer across hospitals</a:t>
             </a:r>
             <a:endParaRPr lang="en-US" sz="1450" dirty="0"/>
           </a:p>
